--- a/presentation.pptx
+++ b/presentation.pptx
@@ -3109,7 +3109,7 @@
         <p:spPr>
           <a:xfrm>
             <a:off x="548640" y="320040"/>
-            <a:ext cx="11155680" cy="731520"/>
+            <a:ext cx="11064240" cy="777240"/>
           </a:xfrm>
           <a:prstGeom prst="rect">
             <a:avLst/>
@@ -3127,20 +3127,20 @@
                 <a:solidFill>
                   <a:srgbClr val="1F2937"/>
                 </a:solidFill>
+                <a:latin typeface="Arial"/>
               </a:rPr>
               <a:t>Book Tracker</a:t>
             </a:r>
           </a:p>
           <a:p>
-            <a:pPr>
-              <a:defRPr sz="1300">
+            <a:r>
+              <a:rPr sz="1300" b="0">
                 <a:solidFill>
                   <a:srgbClr val="6B7280"/>
                 </a:solidFill>
-              </a:defRPr>
-            </a:pPr>
-            <a:r>
-              <a:t>??????????????? ?????? ?? Flask: ????-?????? ?? ???? ?? ?????????</a:t>
+                <a:latin typeface="Arial"/>
+              </a:rPr>
+              <a:t>Самостоятельная работа по Flask: мини-проект от идеи до прототипа</a:t>
             </a:r>
           </a:p>
         </p:txBody>
@@ -3187,62 +3187,67 @@
           <a:lstStyle/>
           <a:p>
             <a:pPr algn="ctr">
-              <a:defRPr sz="2200" b="1">
+              <a:defRPr sz="1800" b="1">
                 <a:solidFill>
                   <a:srgbClr val="115E59"/>
                 </a:solidFill>
+                <a:latin typeface="Arial"/>
               </a:defRPr>
             </a:pPr>
             <a:r>
-              <a:t>????: ?????? ?????? ????</a:t>
+              <a:t>Идея: личный трекер книг</a:t>
             </a:r>
           </a:p>
           <a:p>
             <a:pPr>
-              <a:defRPr sz="1600">
+              <a:defRPr sz="1500" b="0">
                 <a:solidFill>
                   <a:srgbClr val="1F2937"/>
                 </a:solidFill>
+                <a:latin typeface="Arial"/>
               </a:defRPr>
             </a:pPr>
             <a:r>
-              <a:t>????????: ?????? ???? ? ???????? ?????? ???????? ? ????????.</a:t>
+              <a:t>Проблема: список книг и статусов чтения теряется в заметках.</a:t>
             </a:r>
           </a:p>
           <a:p>
             <a:pPr>
-              <a:defRPr sz="1600">
+              <a:defRPr sz="1500" b="0">
                 <a:solidFill>
                   <a:srgbClr val="1F2937"/>
                 </a:solidFill>
+                <a:latin typeface="Arial"/>
               </a:defRPr>
             </a:pPr>
             <a:r>
-              <a:t>???????: ?????? ???-?????????? ??? ????? ????, ???????? ? ???????.</a:t>
+              <a:t>Решение: единое веб-приложение для учета книг, статусов и заметок.</a:t>
             </a:r>
           </a:p>
           <a:p>
             <a:pPr>
-              <a:defRPr sz="1600">
+              <a:defRPr sz="1500" b="0">
                 <a:solidFill>
                   <a:srgbClr val="1F2937"/>
                 </a:solidFill>
+                <a:latin typeface="Arial"/>
               </a:defRPr>
             </a:pPr>
             <a:r>
-              <a:t>???????: ??????????, ??????????????, ????????, ?????, ??????.</a:t>
+              <a:t>Функции: добавление, редактирование, удаление, поиск, фильтр.</a:t>
             </a:r>
           </a:p>
           <a:p>
             <a:pPr>
-              <a:defRPr sz="1600">
+              <a:defRPr sz="1500" b="0">
                 <a:solidFill>
                   <a:srgbClr val="1F2937"/>
                 </a:solidFill>
+                <a:latin typeface="Arial"/>
               </a:defRPr>
             </a:pPr>
             <a:r>
-              <a:t>??????????: Flask, SQLite, HTML/CSS, pytest.</a:t>
+              <a:t>Технологии: Flask, SQLite, HTML/CSS, pytest.</a:t>
             </a:r>
           </a:p>
         </p:txBody>
@@ -3262,7 +3267,7 @@
             <a:avLst/>
           </a:prstGeom>
           <a:solidFill>
-            <a:srgbClr val="FAFCFD"/>
+            <a:srgbClr val="FFFFFF"/>
           </a:solidFill>
           <a:ln>
             <a:solidFill>
@@ -3285,39 +3290,32 @@
           </a:fontRef>
         </p:style>
         <p:txBody>
-          <a:bodyPr rtlCol="0" anchor="ctr"/>
-          <a:lstStyle/>
+          <a:bodyPr rtlCol="0" anchor="ctr" wrap="square"/>
+          <a:lstStyle/>
+          <a:p>
+            <a:pPr algn="ctr">
+              <a:defRPr sz="2000" b="1">
+                <a:solidFill>
+                  <a:srgbClr val="115E59"/>
+                </a:solidFill>
+                <a:latin typeface="Arial"/>
+              </a:defRPr>
+            </a:pPr>
+            <a:r>
+              <a:t>Цель проекта</a:t>
+            </a:r>
+          </a:p>
           <a:p>
             <a:pPr>
-              <a:defRPr sz="1800" b="1">
+              <a:defRPr sz="1700" b="0">
                 <a:solidFill>
                   <a:srgbClr val="1F2937"/>
                 </a:solidFill>
+                <a:latin typeface="Arial"/>
               </a:defRPr>
             </a:pPr>
             <a:r>
-              <a:t>???? ???????</a:t>
-            </a:r>
-          </a:p>
-          <a:p>
-            <a:pPr>
-              <a:defRPr sz="1800">
-                <a:solidFill>
-                  <a:srgbClr val="1F2937"/>
-                </a:solidFill>
-              </a:defRPr>
-            </a:pPr>
-          </a:p>
-          <a:p>
-            <a:pPr>
-              <a:defRPr sz="1800">
-                <a:solidFill>
-                  <a:srgbClr val="1F2937"/>
-                </a:solidFill>
-              </a:defRPr>
-            </a:pPr>
-            <a:r>
-              <a:t>???????? ?????? ???? ??????????: ??????????, ???????????, ??????????, ????? ? ????????????.</a:t>
+              <a:t>Показать полный цикл разработки: требования, архитектура, реализация, тесты и документация.</a:t>
             </a:r>
           </a:p>
         </p:txBody>
@@ -3357,7 +3355,7 @@
         <p:spPr>
           <a:xfrm>
             <a:off x="548640" y="320040"/>
-            <a:ext cx="11155680" cy="731520"/>
+            <a:ext cx="11064240" cy="777240"/>
           </a:xfrm>
           <a:prstGeom prst="rect">
             <a:avLst/>
@@ -3375,20 +3373,20 @@
                 <a:solidFill>
                   <a:srgbClr val="1F2937"/>
                 </a:solidFill>
+                <a:latin typeface="Arial"/>
               </a:rPr>
-              <a:t>?????????</a:t>
-            </a:r>
-          </a:p>
-          <a:p>
-            <a:pPr>
-              <a:defRPr sz="1300">
+              <a:t>Интерфейс</a:t>
+            </a:r>
+          </a:p>
+          <a:p>
+            <a:r>
+              <a:rPr sz="1300" b="0">
                 <a:solidFill>
                   <a:srgbClr val="6B7280"/>
                 </a:solidFill>
-              </a:defRPr>
-            </a:pPr>
-            <a:r>
-              <a:t>??????? ???????? ? ???????, ???????? ? ??????? ????</a:t>
+                <a:latin typeface="Arial"/>
+              </a:rPr>
+              <a:t>Главная страница с поиском, фильтром и списком книг</a:t>
             </a:r>
           </a:p>
         </p:txBody>
@@ -3452,7 +3450,7 @@
         <p:spPr>
           <a:xfrm>
             <a:off x="548640" y="320040"/>
-            <a:ext cx="11155680" cy="731520"/>
+            <a:ext cx="11064240" cy="777240"/>
           </a:xfrm>
           <a:prstGeom prst="rect">
             <a:avLst/>
@@ -3470,20 +3468,20 @@
                 <a:solidFill>
                   <a:srgbClr val="1F2937"/>
                 </a:solidFill>
+                <a:latin typeface="Arial"/>
               </a:rPr>
-              <a:t>???????????</a:t>
-            </a:r>
-          </a:p>
-          <a:p>
-            <a:pPr>
-              <a:defRPr sz="1300">
+              <a:t>Архитектура</a:t>
+            </a:r>
+          </a:p>
+          <a:p>
+            <a:r>
+              <a:rPr sz="1300" b="0">
                 <a:solidFill>
                   <a:srgbClr val="6B7280"/>
                 </a:solidFill>
-              </a:defRPr>
-            </a:pPr>
-            <a:r>
-              <a:t>??????? -&gt; Flask -&gt; SQLite</a:t>
+                <a:latin typeface="Arial"/>
+              </a:rPr>
+              <a:t>Браузер -&gt; Flask -&gt; SQLite</a:t>
             </a:r>
           </a:p>
         </p:txBody>
@@ -3497,7 +3495,7 @@
         <p:spPr>
           <a:xfrm>
             <a:off x="731520" y="1737360"/>
-            <a:ext cx="2560320" cy="1097280"/>
+            <a:ext cx="2651760" cy="1097280"/>
           </a:xfrm>
           <a:prstGeom prst="roundRect">
             <a:avLst/>
@@ -3526,30 +3524,32 @@
           </a:fontRef>
         </p:style>
         <p:txBody>
-          <a:bodyPr rtlCol="0" anchor="ctr"/>
+          <a:bodyPr rtlCol="0" anchor="ctr" wrap="square"/>
           <a:lstStyle/>
           <a:p>
             <a:pPr algn="ctr">
-              <a:defRPr b="1" sz="1600">
+              <a:defRPr sz="1400" b="1">
                 <a:solidFill>
                   <a:srgbClr val="115E59"/>
                 </a:solidFill>
+                <a:latin typeface="Arial"/>
               </a:defRPr>
             </a:pPr>
             <a:r>
-              <a:t>???????</a:t>
+              <a:t>Браузер</a:t>
             </a:r>
           </a:p>
           <a:p>
             <a:pPr algn="ctr">
-              <a:defRPr sz="1100">
+              <a:defRPr sz="1100" b="0">
                 <a:solidFill>
                   <a:srgbClr val="1F2937"/>
                 </a:solidFill>
+                <a:latin typeface="Arial"/>
               </a:defRPr>
             </a:pPr>
             <a:r>
-              <a:t>HTML-???????? ? ?????</a:t>
+              <a:t>HTML-страницы и формы</a:t>
             </a:r>
           </a:p>
         </p:txBody>
@@ -3563,7 +3563,7 @@
         <p:spPr>
           <a:xfrm>
             <a:off x="3657600" y="1737360"/>
-            <a:ext cx="2743200" cy="1097280"/>
+            <a:ext cx="2651760" cy="1097280"/>
           </a:xfrm>
           <a:prstGeom prst="roundRect">
             <a:avLst/>
@@ -3592,14 +3592,15 @@
           </a:fontRef>
         </p:style>
         <p:txBody>
-          <a:bodyPr rtlCol="0" anchor="ctr"/>
+          <a:bodyPr rtlCol="0" anchor="ctr" wrap="square"/>
           <a:lstStyle/>
           <a:p>
             <a:pPr algn="ctr">
-              <a:defRPr b="1" sz="1600">
+              <a:defRPr sz="1400" b="1">
                 <a:solidFill>
                   <a:srgbClr val="115E59"/>
                 </a:solidFill>
+                <a:latin typeface="Arial"/>
               </a:defRPr>
             </a:pPr>
             <a:r>
@@ -3608,14 +3609,15 @@
           </a:p>
           <a:p>
             <a:pPr algn="ctr">
-              <a:defRPr sz="1100">
+              <a:defRPr sz="1100" b="0">
                 <a:solidFill>
                   <a:srgbClr val="1F2937"/>
                 </a:solidFill>
+                <a:latin typeface="Arial"/>
               </a:defRPr>
             </a:pPr>
             <a:r>
-              <a:t>???????? ? ????????? ????????</a:t>
+              <a:t>Маршруты и обработка запросов</a:t>
             </a:r>
           </a:p>
         </p:txBody>
@@ -3629,7 +3631,7 @@
         <p:spPr>
           <a:xfrm>
             <a:off x="6858000" y="1737360"/>
-            <a:ext cx="2743200" cy="1097280"/>
+            <a:ext cx="2651760" cy="1097280"/>
           </a:xfrm>
           <a:prstGeom prst="roundRect">
             <a:avLst/>
@@ -3658,30 +3660,32 @@
           </a:fontRef>
         </p:style>
         <p:txBody>
-          <a:bodyPr rtlCol="0" anchor="ctr"/>
+          <a:bodyPr rtlCol="0" anchor="ctr" wrap="square"/>
           <a:lstStyle/>
           <a:p>
             <a:pPr algn="ctr">
-              <a:defRPr b="1" sz="1600">
+              <a:defRPr sz="1400" b="1">
                 <a:solidFill>
                   <a:srgbClr val="115E59"/>
                 </a:solidFill>
+                <a:latin typeface="Arial"/>
               </a:defRPr>
             </a:pPr>
             <a:r>
-              <a:t>???????</a:t>
+              <a:t>Сервисы</a:t>
             </a:r>
           </a:p>
           <a:p>
             <a:pPr algn="ctr">
-              <a:defRPr sz="1100">
+              <a:defRPr sz="1100" b="0">
                 <a:solidFill>
                   <a:srgbClr val="1F2937"/>
                 </a:solidFill>
+                <a:latin typeface="Arial"/>
               </a:defRPr>
             </a:pPr>
             <a:r>
-              <a:t>????????? ? CRUD-????????</a:t>
+              <a:t>Валидация и CRUD-операции</a:t>
             </a:r>
           </a:p>
         </p:txBody>
@@ -3724,14 +3728,15 @@
           </a:fontRef>
         </p:style>
         <p:txBody>
-          <a:bodyPr rtlCol="0" anchor="ctr"/>
+          <a:bodyPr rtlCol="0" anchor="ctr" wrap="square"/>
           <a:lstStyle/>
           <a:p>
             <a:pPr algn="ctr">
-              <a:defRPr b="1" sz="1600">
+              <a:defRPr sz="1400" b="1">
                 <a:solidFill>
                   <a:srgbClr val="115E59"/>
                 </a:solidFill>
+                <a:latin typeface="Arial"/>
               </a:defRPr>
             </a:pPr>
             <a:r>
@@ -3740,14 +3745,15 @@
           </a:p>
           <a:p>
             <a:pPr algn="ctr">
-              <a:defRPr sz="1100">
+              <a:defRPr sz="1100" b="0">
                 <a:solidFill>
                   <a:srgbClr val="1F2937"/>
                 </a:solidFill>
+                <a:latin typeface="Arial"/>
               </a:defRPr>
             </a:pPr>
             <a:r>
-              <a:t>?????????</a:t>
+              <a:t>Хранилище</a:t>
             </a:r>
           </a:p>
         </p:txBody>
@@ -3760,8 +3766,8 @@
         </p:nvSpPr>
         <p:spPr>
           <a:xfrm>
-            <a:off x="3291840" y="2057400"/>
-            <a:ext cx="365759" cy="365760"/>
+            <a:off x="3246120" y="2057400"/>
+            <a:ext cx="411480" cy="365760"/>
           </a:xfrm>
           <a:prstGeom prst="chevron">
             <a:avLst/>
@@ -3805,8 +3811,8 @@
         </p:nvSpPr>
         <p:spPr>
           <a:xfrm>
-            <a:off x="6400800" y="2057400"/>
-            <a:ext cx="457200" cy="365760"/>
+            <a:off x="6446520" y="2057400"/>
+            <a:ext cx="411480" cy="365760"/>
           </a:xfrm>
           <a:prstGeom prst="chevron">
             <a:avLst/>
@@ -3850,8 +3856,8 @@
         </p:nvSpPr>
         <p:spPr>
           <a:xfrm>
-            <a:off x="9601200" y="2057400"/>
-            <a:ext cx="457200" cy="365760"/>
+            <a:off x="9646920" y="2057400"/>
+            <a:ext cx="411480" cy="365760"/>
           </a:xfrm>
           <a:prstGeom prst="chevron">
             <a:avLst/>
@@ -3902,7 +3908,7 @@
             <a:avLst/>
           </a:prstGeom>
           <a:solidFill>
-            <a:srgbClr val="FAFCFD"/>
+            <a:srgbClr val="FFFFFF"/>
           </a:solidFill>
           <a:ln>
             <a:solidFill>
@@ -3925,78 +3931,84 @@
           </a:fontRef>
         </p:style>
         <p:txBody>
-          <a:bodyPr rtlCol="0" anchor="ctr"/>
-          <a:lstStyle/>
+          <a:bodyPr rtlCol="0" anchor="ctr" wrap="square"/>
+          <a:lstStyle/>
+          <a:p>
+            <a:pPr algn="ctr">
+              <a:defRPr sz="1500" b="1">
+                <a:solidFill>
+                  <a:srgbClr val="115E59"/>
+                </a:solidFill>
+                <a:latin typeface="Arial"/>
+              </a:defRPr>
+            </a:pPr>
+            <a:r>
+              <a:t>Маршруты</a:t>
+            </a:r>
+          </a:p>
           <a:p>
             <a:pPr>
-              <a:defRPr sz="1400" b="1">
+              <a:defRPr sz="1200" b="0">
                 <a:solidFill>
                   <a:srgbClr val="1F2937"/>
                 </a:solidFill>
+                <a:latin typeface="Arial"/>
               </a:defRPr>
             </a:pPr>
             <a:r>
-              <a:t>????????</a:t>
+              <a:t>/ - список и поиск</a:t>
             </a:r>
           </a:p>
           <a:p>
             <a:pPr>
-              <a:defRPr sz="1200">
+              <a:defRPr sz="1200" b="0">
                 <a:solidFill>
                   <a:srgbClr val="1F2937"/>
                 </a:solidFill>
+                <a:latin typeface="Arial"/>
               </a:defRPr>
             </a:pPr>
             <a:r>
-              <a:t>/ -&gt; ?????? ? ?????</a:t>
+              <a:t>/books/new - добавление</a:t>
             </a:r>
           </a:p>
           <a:p>
             <a:pPr>
-              <a:defRPr sz="1200">
+              <a:defRPr sz="1200" b="0">
                 <a:solidFill>
                   <a:srgbClr val="1F2937"/>
                 </a:solidFill>
+                <a:latin typeface="Arial"/>
               </a:defRPr>
             </a:pPr>
             <a:r>
-              <a:t>/books/new -&gt; ??????????</a:t>
+              <a:t>/books/&lt;id&gt; - карточка</a:t>
             </a:r>
           </a:p>
           <a:p>
             <a:pPr>
-              <a:defRPr sz="1200">
+              <a:defRPr sz="1200" b="0">
                 <a:solidFill>
                   <a:srgbClr val="1F2937"/>
                 </a:solidFill>
+                <a:latin typeface="Arial"/>
               </a:defRPr>
             </a:pPr>
             <a:r>
-              <a:t>/books/&lt;id&gt; -&gt; ????????</a:t>
+              <a:t>/books/&lt;id&gt;/edit - редактирование</a:t>
             </a:r>
           </a:p>
           <a:p>
             <a:pPr>
-              <a:defRPr sz="1200">
+              <a:defRPr sz="1200" b="0">
                 <a:solidFill>
                   <a:srgbClr val="1F2937"/>
                 </a:solidFill>
+                <a:latin typeface="Arial"/>
               </a:defRPr>
             </a:pPr>
             <a:r>
-              <a:t>/books/&lt;id&gt;/edit -&gt; ??????????????</a:t>
-            </a:r>
-          </a:p>
-          <a:p>
-            <a:pPr>
-              <a:defRPr sz="1200">
-                <a:solidFill>
-                  <a:srgbClr val="1F2937"/>
-                </a:solidFill>
-              </a:defRPr>
-            </a:pPr>
-            <a:r>
-              <a:t>/books/&lt;id&gt;/delete -&gt; ????????</a:t>
+              <a:t>/books/&lt;id&gt;/delete - удаление</a:t>
             </a:r>
           </a:p>
         </p:txBody>
@@ -4036,7 +4048,7 @@
         <p:spPr>
           <a:xfrm>
             <a:off x="548640" y="320040"/>
-            <a:ext cx="11155680" cy="731520"/>
+            <a:ext cx="11064240" cy="777240"/>
           </a:xfrm>
           <a:prstGeom prst="rect">
             <a:avLst/>
@@ -4054,20 +4066,20 @@
                 <a:solidFill>
                   <a:srgbClr val="1F2937"/>
                 </a:solidFill>
+                <a:latin typeface="Arial"/>
               </a:rPr>
-              <a:t>???</a:t>
-            </a:r>
-          </a:p>
-          <a:p>
-            <a:pPr>
-              <a:defRPr sz="1300">
+              <a:t>Код</a:t>
+            </a:r>
+          </a:p>
+          <a:p>
+            <a:r>
+              <a:rPr sz="1300" b="0">
                 <a:solidFill>
                   <a:srgbClr val="6B7280"/>
                 </a:solidFill>
-              </a:defRPr>
-            </a:pPr>
-            <a:r>
-              <a:t>????????? ????? ? ????? ?? ?????? ????</a:t>
+                <a:latin typeface="Arial"/>
+              </a:rPr>
+              <a:t>Валидация формы и поиск по списку книг</a:t>
             </a:r>
           </a:p>
         </p:txBody>
@@ -4087,7 +4099,7 @@
             <a:avLst/>
           </a:prstGeom>
           <a:solidFill>
-            <a:srgbClr val="F9FAFB"/>
+            <a:srgbClr val="FFFFFF"/>
           </a:solidFill>
           <a:ln>
             <a:solidFill>
@@ -4114,7 +4126,20 @@
           <a:lstStyle/>
           <a:p>
             <a:pPr algn="ctr">
-              <a:defRPr sz="1400">
+              <a:defRPr sz="1700" b="1">
+                <a:solidFill>
+                  <a:srgbClr val="115E59"/>
+                </a:solidFill>
+                <a:latin typeface="Arial"/>
+              </a:defRPr>
+            </a:pPr>
+            <a:r>
+              <a:t>Фрагмент кода</a:t>
+            </a:r>
+          </a:p>
+          <a:p>
+            <a:pPr>
+              <a:defRPr sz="1400" b="0">
                 <a:solidFill>
                   <a:srgbClr val="1F2937"/>
                 </a:solidFill>
@@ -4138,7 +4163,7 @@
             </a:r>
             <a:br/>
             <a:r>
-              <a:t>        errors.append("???? ?????????? ???????????.")</a:t>
+              <a:t>        errors.append("Поле Название обязательно.")</a:t>
             </a:r>
             <a:br/>
             <a:br/>
@@ -4155,9 +4180,8 @@
             </a:r>
             <a:br/>
             <a:r>
-              <a:t>        sql += " AND (LOWER(title) LIKE ? OR LOWER(author) LIKE ? OR LOWER(genre) LIKE ?)"</a:t>
-            </a:r>
-            <a:br/>
+              <a:t>        sql += " AND (LOWER(title) LIKE ? OR LOWER(author) LIKE ?)"</a:t>
+            </a:r>
           </a:p>
         </p:txBody>
       </p:sp>
@@ -4199,75 +4223,71 @@
           </a:fontRef>
         </p:style>
         <p:txBody>
-          <a:bodyPr rtlCol="0" anchor="ctr"/>
-          <a:lstStyle/>
+          <a:bodyPr rtlCol="0" anchor="ctr" wrap="square"/>
+          <a:lstStyle/>
+          <a:p>
+            <a:pPr algn="ctr">
+              <a:defRPr sz="1700" b="1">
+                <a:solidFill>
+                  <a:srgbClr val="115E59"/>
+                </a:solidFill>
+                <a:latin typeface="Arial"/>
+              </a:defRPr>
+            </a:pPr>
+            <a:r>
+              <a:t>Что показывает код</a:t>
+            </a:r>
+          </a:p>
           <a:p>
             <a:pPr>
-              <a:defRPr sz="1700" b="1">
+              <a:defRPr sz="1400" b="0">
                 <a:solidFill>
                   <a:srgbClr val="1F2937"/>
                 </a:solidFill>
+                <a:latin typeface="Arial"/>
               </a:defRPr>
             </a:pPr>
             <a:r>
-              <a:t>??? ?????????? ???</a:t>
+              <a:t>- проверки обязательных полей</a:t>
             </a:r>
           </a:p>
           <a:p>
             <a:pPr>
-              <a:defRPr sz="1400">
+              <a:defRPr sz="1400" b="0">
                 <a:solidFill>
                   <a:srgbClr val="1F2937"/>
                 </a:solidFill>
+                <a:latin typeface="Arial"/>
               </a:defRPr>
             </a:pPr>
+            <a:r>
+              <a:t>- защиту от пустых значений</a:t>
+            </a:r>
           </a:p>
           <a:p>
             <a:pPr>
-              <a:defRPr sz="1400">
+              <a:defRPr sz="1400" b="0">
                 <a:solidFill>
                   <a:srgbClr val="1F2937"/>
                 </a:solidFill>
+                <a:latin typeface="Arial"/>
               </a:defRPr>
             </a:pPr>
             <a:r>
-              <a:t>? ???????? ???????????? ?????</a:t>
+              <a:t>- SQL-поиск по названию и автору</a:t>
             </a:r>
           </a:p>
           <a:p>
             <a:pPr>
-              <a:defRPr sz="1400">
+              <a:defRPr sz="1400" b="0">
                 <a:solidFill>
                   <a:srgbClr val="1F2937"/>
                 </a:solidFill>
+                <a:latin typeface="Arial"/>
               </a:defRPr>
             </a:pPr>
             <a:r>
-              <a:t>? ?????? ?? ?????? ????????</a:t>
-            </a:r>
-          </a:p>
-          <a:p>
-            <a:pPr>
-              <a:defRPr sz="1400">
-                <a:solidFill>
-                  <a:srgbClr val="1F2937"/>
-                </a:solidFill>
-              </a:defRPr>
-            </a:pPr>
-            <a:r>
-              <a:t>? ?????? SQL-????? ?? ????????, ?????? ? ?????</a:t>
-            </a:r>
-          </a:p>
-          <a:p>
-            <a:pPr>
-              <a:defRPr sz="1400">
-                <a:solidFill>
-                  <a:srgbClr val="1F2937"/>
-                </a:solidFill>
-              </a:defRPr>
-            </a:pPr>
-            <a:r>
-              <a:t>? ??????? ? ???????? ?????????</a:t>
+              <a:t>- простую структуру</a:t>
             </a:r>
           </a:p>
         </p:txBody>
@@ -4307,7 +4327,7 @@
         <p:spPr>
           <a:xfrm>
             <a:off x="548640" y="320040"/>
-            <a:ext cx="11155680" cy="731520"/>
+            <a:ext cx="11064240" cy="777240"/>
           </a:xfrm>
           <a:prstGeom prst="rect">
             <a:avLst/>
@@ -4325,20 +4345,20 @@
                 <a:solidFill>
                   <a:srgbClr val="1F2937"/>
                 </a:solidFill>
+                <a:latin typeface="Arial"/>
               </a:rPr>
-              <a:t>?????????</a:t>
-            </a:r>
-          </a:p>
-          <a:p>
-            <a:pPr>
-              <a:defRPr sz="1300">
+              <a:t>Результат</a:t>
+            </a:r>
+          </a:p>
+          <a:p>
+            <a:r>
+              <a:rPr sz="1300" b="0">
                 <a:solidFill>
                   <a:srgbClr val="6B7280"/>
                 </a:solidFill>
-              </a:defRPr>
-            </a:pPr>
-            <a:r>
-              <a:t>??? ?????????? ? ??? ????? ???????? ??????</a:t>
+                <a:latin typeface="Arial"/>
+              </a:rPr>
+              <a:t>Что получилось и что можно добавить дальше</a:t>
             </a:r>
           </a:p>
         </p:txBody>
@@ -4381,75 +4401,71 @@
           </a:fontRef>
         </p:style>
         <p:txBody>
-          <a:bodyPr rtlCol="0" anchor="ctr"/>
-          <a:lstStyle/>
+          <a:bodyPr rtlCol="0" anchor="ctr" wrap="square"/>
+          <a:lstStyle/>
+          <a:p>
+            <a:pPr algn="ctr">
+              <a:defRPr sz="1700" b="1">
+                <a:solidFill>
+                  <a:srgbClr val="115E59"/>
+                </a:solidFill>
+                <a:latin typeface="Arial"/>
+              </a:defRPr>
+            </a:pPr>
+            <a:r>
+              <a:t>Получилось</a:t>
+            </a:r>
+          </a:p>
           <a:p>
             <a:pPr>
-              <a:defRPr sz="1700" b="1">
+              <a:defRPr sz="1400" b="0">
                 <a:solidFill>
                   <a:srgbClr val="1F2937"/>
                 </a:solidFill>
+                <a:latin typeface="Arial"/>
               </a:defRPr>
             </a:pPr>
             <a:r>
-              <a:t>??????????</a:t>
+              <a:t>- рабочий Flask-прототип</a:t>
             </a:r>
           </a:p>
           <a:p>
             <a:pPr>
-              <a:defRPr sz="1400">
+              <a:defRPr sz="1400" b="0">
                 <a:solidFill>
                   <a:srgbClr val="1F2937"/>
                 </a:solidFill>
+                <a:latin typeface="Arial"/>
               </a:defRPr>
             </a:pPr>
+            <a:r>
+              <a:t>- SQLite-хранилище</a:t>
+            </a:r>
           </a:p>
           <a:p>
             <a:pPr>
-              <a:defRPr sz="1400">
+              <a:defRPr sz="1400" b="0">
                 <a:solidFill>
                   <a:srgbClr val="1F2937"/>
                 </a:solidFill>
+                <a:latin typeface="Arial"/>
               </a:defRPr>
             </a:pPr>
             <a:r>
-              <a:t>? ??????? Flask-????????</a:t>
+              <a:t>- 5 автоматических тестов</a:t>
             </a:r>
           </a:p>
           <a:p>
             <a:pPr>
-              <a:defRPr sz="1400">
+              <a:defRPr sz="1400" b="0">
                 <a:solidFill>
                   <a:srgbClr val="1F2937"/>
                 </a:solidFill>
+                <a:latin typeface="Arial"/>
               </a:defRPr>
             </a:pPr>
             <a:r>
-              <a:t>? SQLite-?????????</a:t>
-            </a:r>
-          </a:p>
-          <a:p>
-            <a:pPr>
-              <a:defRPr sz="1400">
-                <a:solidFill>
-                  <a:srgbClr val="1F2937"/>
-                </a:solidFill>
-              </a:defRPr>
-            </a:pPr>
-            <a:r>
-              <a:t>? 5 ?????????????? ??????</a:t>
-            </a:r>
-          </a:p>
-          <a:p>
-            <a:pPr>
-              <a:defRPr sz="1400">
-                <a:solidFill>
-                  <a:srgbClr val="1F2937"/>
-                </a:solidFill>
-              </a:defRPr>
-            </a:pPr>
-            <a:r>
-              <a:t>? ???????????? ? ??????????? ????????????</a:t>
+              <a:t>- документация и руководство пользователя</a:t>
             </a:r>
           </a:p>
         </p:txBody>
@@ -4469,7 +4485,7 @@
             <a:avLst/>
           </a:prstGeom>
           <a:solidFill>
-            <a:srgbClr val="FAFCFD"/>
+            <a:srgbClr val="FFFFFF"/>
           </a:solidFill>
           <a:ln>
             <a:solidFill>
@@ -4492,75 +4508,71 @@
           </a:fontRef>
         </p:style>
         <p:txBody>
-          <a:bodyPr rtlCol="0" anchor="ctr"/>
-          <a:lstStyle/>
+          <a:bodyPr rtlCol="0" anchor="ctr" wrap="square"/>
+          <a:lstStyle/>
+          <a:p>
+            <a:pPr algn="ctr">
+              <a:defRPr sz="1700" b="1">
+                <a:solidFill>
+                  <a:srgbClr val="115E59"/>
+                </a:solidFill>
+                <a:latin typeface="Arial"/>
+              </a:defRPr>
+            </a:pPr>
+            <a:r>
+              <a:t>Планы развития</a:t>
+            </a:r>
+          </a:p>
           <a:p>
             <a:pPr>
-              <a:defRPr sz="1700" b="1">
+              <a:defRPr sz="1400" b="0">
                 <a:solidFill>
                   <a:srgbClr val="1F2937"/>
                 </a:solidFill>
+                <a:latin typeface="Arial"/>
               </a:defRPr>
             </a:pPr>
             <a:r>
-              <a:t>????? ????????</a:t>
+              <a:t>- авторизация пользователей</a:t>
             </a:r>
           </a:p>
           <a:p>
             <a:pPr>
-              <a:defRPr sz="1400">
+              <a:defRPr sz="1400" b="0">
                 <a:solidFill>
                   <a:srgbClr val="1F2937"/>
                 </a:solidFill>
+                <a:latin typeface="Arial"/>
               </a:defRPr>
             </a:pPr>
+            <a:r>
+              <a:t>- теги и подборки</a:t>
+            </a:r>
           </a:p>
           <a:p>
             <a:pPr>
-              <a:defRPr sz="1400">
+              <a:defRPr sz="1400" b="0">
                 <a:solidFill>
                   <a:srgbClr val="1F2937"/>
                 </a:solidFill>
+                <a:latin typeface="Arial"/>
               </a:defRPr>
             </a:pPr>
             <a:r>
-              <a:t>? ??????????? ?????????????</a:t>
+              <a:t>- улучшенная статистика чтения</a:t>
             </a:r>
           </a:p>
           <a:p>
             <a:pPr>
-              <a:defRPr sz="1400">
+              <a:defRPr sz="1400" b="0">
                 <a:solidFill>
                   <a:srgbClr val="1F2937"/>
                 </a:solidFill>
+                <a:latin typeface="Arial"/>
               </a:defRPr>
             </a:pPr>
             <a:r>
-              <a:t>? ???? ? ????????</a:t>
-            </a:r>
-          </a:p>
-          <a:p>
-            <a:pPr>
-              <a:defRPr sz="1400">
-                <a:solidFill>
-                  <a:srgbClr val="1F2937"/>
-                </a:solidFill>
-              </a:defRPr>
-            </a:pPr>
-            <a:r>
-              <a:t>? ?????????? ?????????? ??????</a:t>
-            </a:r>
-          </a:p>
-          <a:p>
-            <a:pPr>
-              <a:defRPr sz="1400">
-                <a:solidFill>
-                  <a:srgbClr val="1F2937"/>
-                </a:solidFill>
-              </a:defRPr>
-            </a:pPr>
-            <a:r>
-              <a:t>? deployment ?? ???????</a:t>
+              <a:t>- deployment на хостинг</a:t>
             </a:r>
           </a:p>
         </p:txBody>
